--- a/statistics_03a_sampling_errors.pptx
+++ b/statistics_03a_sampling_errors.pptx
@@ -2627,7 +2627,7 @@
           <a:p>
             <a:fld id="{4EB26A4E-7CA4-0D47-BAAE-19E050D9F531}" type="datetimeFigureOut">
               <a:rPr lang="en-US" smtClean="0"/>
-              <a:t>5/19/22</a:t>
+              <a:t>5/20/22</a:t>
             </a:fld>
             <a:endParaRPr lang="en-US"/>
           </a:p>
@@ -13881,7 +13881,7 @@
           <a:p>
             <a:r>
               <a:rPr lang="en-US" dirty="0"/>
-              <a:t>Atention – it is easy to mis-use statistics:</a:t>
+              <a:t>Attention – it is easy to mis-use statistics:</a:t>
             </a:r>
           </a:p>
           <a:p>
